--- a/Doc/Appium - Notes.pptx
+++ b/Doc/Appium - Notes.pptx
@@ -5,10 +5,10 @@
     <p:sldMasterId id="2147483670" r:id="rId4"/>
   </p:sldMasterIdLst>
   <p:notesMasterIdLst>
-    <p:notesMasterId r:id="rId11"/>
+    <p:notesMasterId r:id="rId12"/>
   </p:notesMasterIdLst>
   <p:handoutMasterIdLst>
-    <p:handoutMasterId r:id="rId12"/>
+    <p:handoutMasterId r:id="rId13"/>
   </p:handoutMasterIdLst>
   <p:sldIdLst>
     <p:sldId id="256" r:id="rId5"/>
@@ -17,6 +17,7 @@
     <p:sldId id="259" r:id="rId8"/>
     <p:sldId id="260" r:id="rId9"/>
     <p:sldId id="261" r:id="rId10"/>
+    <p:sldId id="262" r:id="rId11"/>
   </p:sldIdLst>
   <p:sldSz cx="12192000" cy="6858000"/>
   <p:notesSz cx="6858000" cy="9144000"/>
@@ -223,7 +224,7 @@
           <a:p>
             <a:fld id="{56C2D11A-4A4C-4762-9A3D-38B816BFA086}" type="datetimeFigureOut">
               <a:rPr lang="fr-FR" smtClean="0"/>
-              <a:t>15/03/2026</a:t>
+              <a:t>16/03/2026</a:t>
             </a:fld>
             <a:endParaRPr lang="fr-FR"/>
           </a:p>
@@ -388,7 +389,7 @@
           <a:p>
             <a:fld id="{DD3E8838-E61C-436D-81FA-CFC9A861CF2C}" type="datetimeFigureOut">
               <a:rPr lang="fr-FR" noProof="0" smtClean="0"/>
-              <a:t>14/03/2026</a:t>
+              <a:t>16/03/2026</a:t>
             </a:fld>
             <a:endParaRPr lang="fr-FR" noProof="0"/>
           </a:p>
@@ -1446,6 +1447,90 @@
 </p:notes>
 </file>
 
+<file path=ppt/notesSlides/notesSlide3.xml><?xml version="1.0" encoding="utf-8"?>
+<p:notes xmlns:a="http://schemas.openxmlformats.org/drawingml/2006/main" xmlns:r="http://schemas.openxmlformats.org/officeDocument/2006/relationships" xmlns:p="http://schemas.openxmlformats.org/presentationml/2006/main">
+  <p:cSld>
+    <p:spTree>
+      <p:nvGrpSpPr>
+        <p:cNvPr id="1" name=""/>
+        <p:cNvGrpSpPr/>
+        <p:nvPr/>
+      </p:nvGrpSpPr>
+      <p:grpSpPr>
+        <a:xfrm>
+          <a:off x="0" y="0"/>
+          <a:ext cx="0" cy="0"/>
+          <a:chOff x="0" y="0"/>
+          <a:chExt cx="0" cy="0"/>
+        </a:xfrm>
+      </p:grpSpPr>
+      <p:sp>
+        <p:nvSpPr>
+          <p:cNvPr id="2" name="Espace réservé de l'image des diapositives 1"/>
+          <p:cNvSpPr>
+            <a:spLocks noGrp="1" noRot="1" noChangeAspect="1"/>
+          </p:cNvSpPr>
+          <p:nvPr>
+            <p:ph type="sldImg"/>
+          </p:nvPr>
+        </p:nvSpPr>
+        <p:spPr/>
+      </p:sp>
+      <p:sp>
+        <p:nvSpPr>
+          <p:cNvPr id="3" name="Espace réservé des notes 2"/>
+          <p:cNvSpPr>
+            <a:spLocks noGrp="1"/>
+          </p:cNvSpPr>
+          <p:nvPr>
+            <p:ph type="body" idx="1"/>
+          </p:nvPr>
+        </p:nvSpPr>
+        <p:spPr/>
+        <p:txBody>
+          <a:bodyPr/>
+          <a:lstStyle/>
+          <a:p>
+            <a:endParaRPr lang="en-GB"/>
+          </a:p>
+        </p:txBody>
+      </p:sp>
+      <p:sp>
+        <p:nvSpPr>
+          <p:cNvPr id="4" name="Espace réservé du numéro de diapositive 3"/>
+          <p:cNvSpPr>
+            <a:spLocks noGrp="1"/>
+          </p:cNvSpPr>
+          <p:nvPr>
+            <p:ph type="sldNum" sz="quarter" idx="5"/>
+          </p:nvPr>
+        </p:nvSpPr>
+        <p:spPr/>
+        <p:txBody>
+          <a:bodyPr/>
+          <a:lstStyle/>
+          <a:p>
+            <a:fld id="{1DB0C060-F7D4-4C65-826A-795CA5BE88E2}" type="slidenum">
+              <a:rPr lang="fr-FR" noProof="0" smtClean="0"/>
+              <a:t>7</a:t>
+            </a:fld>
+            <a:endParaRPr lang="fr-FR" noProof="0"/>
+          </a:p>
+        </p:txBody>
+      </p:sp>
+    </p:spTree>
+    <p:extLst>
+      <p:ext uri="{BB962C8B-B14F-4D97-AF65-F5344CB8AC3E}">
+        <p14:creationId xmlns:p14="http://schemas.microsoft.com/office/powerpoint/2010/main" val="1729773428"/>
+      </p:ext>
+    </p:extLst>
+  </p:cSld>
+  <p:clrMapOvr>
+    <a:masterClrMapping/>
+  </p:clrMapOvr>
+</p:notes>
+</file>
+
 <file path=ppt/slideLayouts/slideLayout1.xml><?xml version="1.0" encoding="utf-8"?>
 <p:sldLayout xmlns:a="http://schemas.openxmlformats.org/drawingml/2006/main" xmlns:r="http://schemas.openxmlformats.org/officeDocument/2006/relationships" xmlns:p="http://schemas.openxmlformats.org/presentationml/2006/main" showMasterSp="0" type="title" preserve="1">
   <p:cSld name="Diapositive de titre">
@@ -1691,7 +1776,7 @@
             <a:pPr rtl="0"/>
             <a:fld id="{92829AA3-688F-4FAF-9C70-2EAED5DE0A5F}" type="datetime1">
               <a:rPr lang="fr-FR" noProof="0" smtClean="0"/>
-              <a:t>14/03/2026</a:t>
+              <a:t>16/03/2026</a:t>
             </a:fld>
             <a:endParaRPr lang="fr-FR" noProof="0"/>
           </a:p>
@@ -1882,7 +1967,7 @@
             <a:pPr rtl="0"/>
             <a:fld id="{0F708A2A-6F02-48A2-99AD-832CF5AA71DA}" type="datetime1">
               <a:rPr lang="fr-FR" noProof="0" smtClean="0"/>
-              <a:t>14/03/2026</a:t>
+              <a:t>16/03/2026</a:t>
             </a:fld>
             <a:endParaRPr lang="fr-FR" noProof="0"/>
           </a:p>
@@ -2128,7 +2213,7 @@
             <a:pPr rtl="0"/>
             <a:fld id="{0F708A2A-6F02-48A2-99AD-832CF5AA71DA}" type="datetime1">
               <a:rPr lang="fr-FR" noProof="0" smtClean="0"/>
-              <a:t>14/03/2026</a:t>
+              <a:t>16/03/2026</a:t>
             </a:fld>
             <a:endParaRPr lang="fr-FR" noProof="0"/>
           </a:p>
@@ -2320,7 +2405,7 @@
             <a:pPr rtl="0"/>
             <a:fld id="{3B779C31-26A2-4001-8DD7-CEA4A5920D6F}" type="datetime1">
               <a:rPr lang="fr-FR" noProof="0" smtClean="0"/>
-              <a:t>14/03/2026</a:t>
+              <a:t>16/03/2026</a:t>
             </a:fld>
             <a:endParaRPr lang="fr-FR" noProof="0"/>
           </a:p>
@@ -2688,7 +2773,7 @@
             <a:pPr rtl="0"/>
             <a:fld id="{0F708A2A-6F02-48A2-99AD-832CF5AA71DA}" type="datetime1">
               <a:rPr lang="fr-FR" noProof="0" smtClean="0"/>
-              <a:t>14/03/2026</a:t>
+              <a:t>16/03/2026</a:t>
             </a:fld>
             <a:endParaRPr lang="fr-FR" noProof="0"/>
           </a:p>
@@ -2919,7 +3004,7 @@
             <a:pPr rtl="0"/>
             <a:fld id="{0F708A2A-6F02-48A2-99AD-832CF5AA71DA}" type="datetime1">
               <a:rPr lang="fr-FR" noProof="0" smtClean="0"/>
-              <a:t>14/03/2026</a:t>
+              <a:t>16/03/2026</a:t>
             </a:fld>
             <a:endParaRPr lang="fr-FR" noProof="0"/>
           </a:p>
@@ -3353,7 +3438,7 @@
             <a:pPr rtl="0"/>
             <a:fld id="{1E313F57-3095-42DA-A8AD-EACF93632B45}" type="datetime1">
               <a:rPr lang="fr-FR" noProof="0" smtClean="0"/>
-              <a:t>14/03/2026</a:t>
+              <a:t>16/03/2026</a:t>
             </a:fld>
             <a:endParaRPr lang="fr-FR" noProof="0"/>
           </a:p>
@@ -3492,7 +3577,7 @@
             <a:pPr rtl="0"/>
             <a:fld id="{0F708A2A-6F02-48A2-99AD-832CF5AA71DA}" type="datetime1">
               <a:rPr lang="fr-FR" noProof="0" smtClean="0"/>
-              <a:t>14/03/2026</a:t>
+              <a:t>16/03/2026</a:t>
             </a:fld>
             <a:endParaRPr lang="fr-FR" noProof="0"/>
           </a:p>
@@ -3653,7 +3738,7 @@
             <a:pPr rtl="0"/>
             <a:fld id="{17C76EA5-DE82-4067-88F3-4BF0BABA598F}" type="datetime1">
               <a:rPr lang="fr-FR" noProof="0" smtClean="0"/>
-              <a:t>14/03/2026</a:t>
+              <a:t>16/03/2026</a:t>
             </a:fld>
             <a:endParaRPr lang="fr-FR" noProof="0"/>
           </a:p>
@@ -3985,7 +4070,7 @@
             <a:pPr rtl="0"/>
             <a:fld id="{31C46C69-7F73-47D5-86D5-FDA507AE9AA8}" type="datetime1">
               <a:rPr lang="fr-FR" noProof="0" smtClean="0"/>
-              <a:t>14/03/2026</a:t>
+              <a:t>16/03/2026</a:t>
             </a:fld>
             <a:endParaRPr lang="fr-FR" noProof="0"/>
           </a:p>
@@ -4338,7 +4423,7 @@
             <a:pPr rtl="0"/>
             <a:fld id="{973E1055-39CE-418F-9B0E-741B5617658E}" type="datetime1">
               <a:rPr lang="fr-FR" noProof="0" smtClean="0"/>
-              <a:t>14/03/2026</a:t>
+              <a:t>16/03/2026</a:t>
             </a:fld>
             <a:endParaRPr lang="fr-FR" noProof="0"/>
           </a:p>
@@ -4601,7 +4686,7 @@
             <a:pPr rtl="0"/>
             <a:fld id="{0F708A2A-6F02-48A2-99AD-832CF5AA71DA}" type="datetime1">
               <a:rPr lang="fr-FR" noProof="0" smtClean="0"/>
-              <a:t>14/03/2026</a:t>
+              <a:t>16/03/2026</a:t>
             </a:fld>
             <a:endParaRPr lang="fr-FR" noProof="0"/>
           </a:p>
@@ -6084,6 +6169,140 @@
     <p:extLst>
       <p:ext uri="{BB962C8B-B14F-4D97-AF65-F5344CB8AC3E}">
         <p14:creationId xmlns:p14="http://schemas.microsoft.com/office/powerpoint/2010/main" val="655567833"/>
+      </p:ext>
+    </p:extLst>
+  </p:cSld>
+  <p:clrMapOvr>
+    <a:masterClrMapping/>
+  </p:clrMapOvr>
+</p:sld>
+</file>
+
+<file path=ppt/slides/slide7.xml><?xml version="1.0" encoding="utf-8"?>
+<p:sld xmlns:a="http://schemas.openxmlformats.org/drawingml/2006/main" xmlns:r="http://schemas.openxmlformats.org/officeDocument/2006/relationships" xmlns:p="http://schemas.openxmlformats.org/presentationml/2006/main">
+  <p:cSld>
+    <p:spTree>
+      <p:nvGrpSpPr>
+        <p:cNvPr id="1" name=""/>
+        <p:cNvGrpSpPr/>
+        <p:nvPr/>
+      </p:nvGrpSpPr>
+      <p:grpSpPr>
+        <a:xfrm>
+          <a:off x="0" y="0"/>
+          <a:ext cx="0" cy="0"/>
+          <a:chOff x="0" y="0"/>
+          <a:chExt cx="0" cy="0"/>
+        </a:xfrm>
+      </p:grpSpPr>
+      <p:sp>
+        <p:nvSpPr>
+          <p:cNvPr id="2" name="Titre 1">
+            <a:extLst>
+              <a:ext uri="{FF2B5EF4-FFF2-40B4-BE49-F238E27FC236}">
+                <a16:creationId xmlns:a16="http://schemas.microsoft.com/office/drawing/2014/main" id="{06D6FD8F-A615-1980-9EAD-E8F2D95478AD}"/>
+              </a:ext>
+            </a:extLst>
+          </p:cNvPr>
+          <p:cNvSpPr>
+            <a:spLocks noGrp="1"/>
+          </p:cNvSpPr>
+          <p:nvPr>
+            <p:ph type="title"/>
+          </p:nvPr>
+        </p:nvSpPr>
+        <p:spPr/>
+        <p:txBody>
+          <a:bodyPr/>
+          <a:lstStyle/>
+          <a:p>
+            <a:r>
+              <a:rPr lang="en-GB" dirty="0"/>
+              <a:t>Appium Inspector</a:t>
+            </a:r>
+          </a:p>
+        </p:txBody>
+      </p:sp>
+      <p:sp>
+        <p:nvSpPr>
+          <p:cNvPr id="3" name="Espace réservé du contenu 2">
+            <a:extLst>
+              <a:ext uri="{FF2B5EF4-FFF2-40B4-BE49-F238E27FC236}">
+                <a16:creationId xmlns:a16="http://schemas.microsoft.com/office/drawing/2014/main" id="{F5BC6194-9591-C0C6-5855-75E93D44C4E6}"/>
+              </a:ext>
+            </a:extLst>
+          </p:cNvPr>
+          <p:cNvSpPr>
+            <a:spLocks noGrp="1"/>
+          </p:cNvSpPr>
+          <p:nvPr>
+            <p:ph idx="1"/>
+          </p:nvPr>
+        </p:nvSpPr>
+        <p:spPr/>
+        <p:txBody>
+          <a:bodyPr/>
+          <a:lstStyle/>
+          <a:p>
+            <a:r>
+              <a:rPr lang="en-GB" dirty="0" err="1">
+                <a:hlinkClick r:id="rId3"/>
+              </a:rPr>
+              <a:t>appium</a:t>
+            </a:r>
+            <a:r>
+              <a:rPr lang="en-GB" dirty="0">
+                <a:hlinkClick r:id="rId3"/>
+              </a:rPr>
+              <a:t>/</a:t>
+            </a:r>
+            <a:r>
+              <a:rPr lang="en-GB" dirty="0" err="1">
+                <a:hlinkClick r:id="rId3"/>
+              </a:rPr>
+              <a:t>appium</a:t>
+            </a:r>
+            <a:r>
+              <a:rPr lang="en-GB" dirty="0">
+                <a:hlinkClick r:id="rId3"/>
+              </a:rPr>
+              <a:t>-inspector: A GUI inspector for mobile apps and more, powered by a (separately installed) Appium server</a:t>
+            </a:r>
+            <a:br>
+              <a:rPr lang="en-GB" dirty="0"/>
+            </a:br>
+            <a:r>
+              <a:rPr lang="en-GB" dirty="0"/>
+              <a:t>https://github.com/appium/appium-inspector</a:t>
+            </a:r>
+            <a:endParaRPr lang="en-GB" dirty="0">
+              <a:hlinkClick r:id="rId4"/>
+            </a:endParaRPr>
+          </a:p>
+          <a:p>
+            <a:r>
+              <a:rPr lang="en-GB" dirty="0">
+                <a:hlinkClick r:id="rId4"/>
+              </a:rPr>
+              <a:t>Appium Server Security - Appium Documentation</a:t>
+            </a:r>
+            <a:br>
+              <a:rPr lang="en-GB" dirty="0"/>
+            </a:br>
+            <a:r>
+              <a:rPr lang="en-GB" dirty="0"/>
+              <a:t>https://appium.io/docs/en/latest/guides/security/#insecure-features</a:t>
+            </a:r>
+          </a:p>
+          <a:p>
+            <a:endParaRPr lang="en-GB" dirty="0"/>
+          </a:p>
+        </p:txBody>
+      </p:sp>
+    </p:spTree>
+    <p:extLst>
+      <p:ext uri="{BB962C8B-B14F-4D97-AF65-F5344CB8AC3E}">
+        <p14:creationId xmlns:p14="http://schemas.microsoft.com/office/powerpoint/2010/main" val="3967154747"/>
       </p:ext>
     </p:extLst>
   </p:cSld>
@@ -6899,6 +7118,24 @@
 </file>
 
 <file path=customXml/item1.xml><?xml version="1.0" encoding="utf-8"?>
+<p:properties xmlns:p="http://schemas.microsoft.com/office/2006/metadata/properties" xmlns:xsi="http://www.w3.org/2001/XMLSchema-instance" xmlns:pc="http://schemas.microsoft.com/office/infopath/2007/PartnerControls">
+  <documentManagement>
+    <Status xmlns="71af3243-3dd4-4a8d-8c0d-dd76da1f02a5">Not started</Status>
+    <MediaServiceKeyPoints xmlns="71af3243-3dd4-4a8d-8c0d-dd76da1f02a5" xsi:nil="true"/>
+  </documentManagement>
+</p:properties>
+</file>
+
+<file path=customXml/item2.xml><?xml version="1.0" encoding="utf-8"?>
+<?mso-contentType ?>
+<FormTemplates xmlns="http://schemas.microsoft.com/sharepoint/v3/contenttype/forms">
+  <Display>DocumentLibraryForm</Display>
+  <Edit>DocumentLibraryForm</Edit>
+  <New>DocumentLibraryForm</New>
+</FormTemplates>
+</file>
+
+<file path=customXml/item3.xml><?xml version="1.0" encoding="utf-8"?>
 <ct:contentTypeSchema xmlns:ct="http://schemas.microsoft.com/office/2006/metadata/contentType" xmlns:ma="http://schemas.microsoft.com/office/2006/metadata/properties/metaAttributes" ct:_="" ma:_="" ma:contentTypeName="Document" ma:contentTypeID="0x01010079F111ED35F8CC479449609E8A0923A6" ma:contentTypeVersion="12" ma:contentTypeDescription="Create a new document." ma:contentTypeScope="" ma:versionID="a410dd7f93c95333ffa1b60ed6adedd1">
   <xsd:schema xmlns:xsd="http://www.w3.org/2001/XMLSchema" xmlns:xs="http://www.w3.org/2001/XMLSchema" xmlns:p="http://schemas.microsoft.com/office/2006/metadata/properties" xmlns:ns2="71af3243-3dd4-4a8d-8c0d-dd76da1f02a5" xmlns:ns3="16c05727-aa75-4e4a-9b5f-8a80a1165891" targetNamespace="http://schemas.microsoft.com/office/2006/metadata/properties" ma:root="true" ma:fieldsID="a936d9baba76aa3866493feff160faab" ns2:_="" ns3:_="">
     <xsd:import namespace="71af3243-3dd4-4a8d-8c0d-dd76da1f02a5"/>
@@ -7119,25 +7356,32 @@
 </ct:contentTypeSchema>
 </file>
 
-<file path=customXml/item2.xml><?xml version="1.0" encoding="utf-8"?>
-<?mso-contentType ?>
-<FormTemplates xmlns="http://schemas.microsoft.com/sharepoint/v3/contenttype/forms">
-  <Display>DocumentLibraryForm</Display>
-  <Edit>DocumentLibraryForm</Edit>
-  <New>DocumentLibraryForm</New>
-</FormTemplates>
+<file path=customXml/itemProps1.xml><?xml version="1.0" encoding="utf-8"?>
+<ds:datastoreItem xmlns:ds="http://schemas.openxmlformats.org/officeDocument/2006/customXml" ds:itemID="{A03EEFF0-FB57-4CB4-8BFC-DF397689E2ED}">
+  <ds:schemaRefs>
+    <ds:schemaRef ds:uri="16c05727-aa75-4e4a-9b5f-8a80a1165891"/>
+    <ds:schemaRef ds:uri="71af3243-3dd4-4a8d-8c0d-dd76da1f02a5"/>
+    <ds:schemaRef ds:uri="http://purl.org/dc/dcmitype/"/>
+    <ds:schemaRef ds:uri="http://purl.org/dc/elements/1.1/"/>
+    <ds:schemaRef ds:uri="http://purl.org/dc/terms/"/>
+    <ds:schemaRef ds:uri="http://schemas.microsoft.com/office/2006/documentManagement/types"/>
+    <ds:schemaRef ds:uri="http://schemas.microsoft.com/office/2006/metadata/properties"/>
+    <ds:schemaRef ds:uri="http://schemas.microsoft.com/office/infopath/2007/PartnerControls"/>
+    <ds:schemaRef ds:uri="http://schemas.openxmlformats.org/package/2006/metadata/core-properties"/>
+    <ds:schemaRef ds:uri="http://www.w3.org/XML/1998/namespace"/>
+  </ds:schemaRefs>
+</ds:datastoreItem>
 </file>
 
-<file path=customXml/item3.xml><?xml version="1.0" encoding="utf-8"?>
-<p:properties xmlns:p="http://schemas.microsoft.com/office/2006/metadata/properties" xmlns:xsi="http://www.w3.org/2001/XMLSchema-instance" xmlns:pc="http://schemas.microsoft.com/office/infopath/2007/PartnerControls">
-  <documentManagement>
-    <Status xmlns="71af3243-3dd4-4a8d-8c0d-dd76da1f02a5">Not started</Status>
-    <MediaServiceKeyPoints xmlns="71af3243-3dd4-4a8d-8c0d-dd76da1f02a5" xsi:nil="true"/>
-  </documentManagement>
-</p:properties>
+<file path=customXml/itemProps2.xml><?xml version="1.0" encoding="utf-8"?>
+<ds:datastoreItem xmlns:ds="http://schemas.openxmlformats.org/officeDocument/2006/customXml" ds:itemID="{AA3F7EDC-E5B4-4BBC-9D2A-CBE6D46C37AD}">
+  <ds:schemaRefs>
+    <ds:schemaRef ds:uri="http://schemas.microsoft.com/sharepoint/v3/contenttype/forms"/>
+  </ds:schemaRefs>
+</ds:datastoreItem>
 </file>
 
-<file path=customXml/itemProps1.xml><?xml version="1.0" encoding="utf-8"?>
+<file path=customXml/itemProps3.xml><?xml version="1.0" encoding="utf-8"?>
 <ds:datastoreItem xmlns:ds="http://schemas.openxmlformats.org/officeDocument/2006/customXml" ds:itemID="{93932EF5-314F-409E-8020-FEE5FA0795B9}">
   <ds:schemaRefs>
     <ds:schemaRef ds:uri="16c05727-aa75-4e4a-9b5f-8a80a1165891"/>
@@ -7154,29 +7398,4 @@
     <ds:schemaRef ds:uri="http://www.w3.org/2001/XMLSchema"/>
   </ds:schemaRefs>
 </ds:datastoreItem>
-</file>
-
-<file path=customXml/itemProps2.xml><?xml version="1.0" encoding="utf-8"?>
-<ds:datastoreItem xmlns:ds="http://schemas.openxmlformats.org/officeDocument/2006/customXml" ds:itemID="{AA3F7EDC-E5B4-4BBC-9D2A-CBE6D46C37AD}">
-  <ds:schemaRefs>
-    <ds:schemaRef ds:uri="http://schemas.microsoft.com/sharepoint/v3/contenttype/forms"/>
-  </ds:schemaRefs>
-</ds:datastoreItem>
-</file>
-
-<file path=customXml/itemProps3.xml><?xml version="1.0" encoding="utf-8"?>
-<ds:datastoreItem xmlns:ds="http://schemas.openxmlformats.org/officeDocument/2006/customXml" ds:itemID="{A03EEFF0-FB57-4CB4-8BFC-DF397689E2ED}">
-  <ds:schemaRefs>
-    <ds:schemaRef ds:uri="16c05727-aa75-4e4a-9b5f-8a80a1165891"/>
-    <ds:schemaRef ds:uri="71af3243-3dd4-4a8d-8c0d-dd76da1f02a5"/>
-    <ds:schemaRef ds:uri="http://purl.org/dc/dcmitype/"/>
-    <ds:schemaRef ds:uri="http://purl.org/dc/elements/1.1/"/>
-    <ds:schemaRef ds:uri="http://purl.org/dc/terms/"/>
-    <ds:schemaRef ds:uri="http://schemas.microsoft.com/office/2006/documentManagement/types"/>
-    <ds:schemaRef ds:uri="http://schemas.microsoft.com/office/2006/metadata/properties"/>
-    <ds:schemaRef ds:uri="http://schemas.microsoft.com/office/infopath/2007/PartnerControls"/>
-    <ds:schemaRef ds:uri="http://schemas.openxmlformats.org/package/2006/metadata/core-properties"/>
-    <ds:schemaRef ds:uri="http://www.w3.org/XML/1998/namespace"/>
-  </ds:schemaRefs>
-</ds:datastoreItem>
 </file>